--- a/sludzy_bachusa/Prezentacja Sludzy Bachusa.pptx
+++ b/sludzy_bachusa/Prezentacja Sludzy Bachusa.pptx
@@ -137,7 +137,7 @@
 <file path=ppt/revisionInfo.xml><?xml version="1.0" encoding="utf-8"?>
 <p1510:revInfo xmlns:a="http://schemas.openxmlformats.org/drawingml/2006/main" xmlns:r="http://schemas.openxmlformats.org/officeDocument/2006/relationships" xmlns:p1510="http://schemas.microsoft.com/office/powerpoint/2015/10/main">
   <p1510:revLst>
-    <p1510:client id="{0DDD031B-ACCC-7095-A1AC-4F41549D48A4}" v="135" dt="2025-10-11T18:12:13.618"/>
+    <p1510:client id="{0DDD031B-ACCC-7095-A1AC-4F41549D48A4}" v="145" dt="2025-10-11T18:58:32.786"/>
     <p1510:client id="{372BD63D-593E-AC82-6015-DC7F38EAEBA8}" v="3" dt="2025-10-11T17:24:14.672"/>
     <p1510:client id="{ACF6BC14-4A37-C579-9D2E-38FF0DC8B246}" v="246" dt="2025-10-11T18:06:12.423"/>
   </p1510:revLst>
@@ -10337,16 +10337,9 @@
                 <a:ea typeface="+mn-lt"/>
                 <a:cs typeface="+mn-lt"/>
               </a:rPr>
-              <a:t> 🧪 laboratoria i uczelnie – analiza i nauka wpływu </a:t>
-            </a:r>
-            <a:r>
-              <a:rPr lang="pl-PL" sz="2000">
-                <a:ea typeface="+mn-lt"/>
-                <a:cs typeface="+mn-lt"/>
-              </a:rPr>
-              <a:t>cech chemicznych na jakość,</a:t>
-            </a:r>
-            <a:endParaRPr lang="pl-PL">
+              <a:t> 🧪 laboratoria i uczelnie – analiza i nauka wpływu cech chemicznych na jakość,</a:t>
+            </a:r>
+            <a:endParaRPr lang="pl-PL" dirty="0">
               <a:ea typeface="+mn-lt"/>
               <a:cs typeface="+mn-lt"/>
             </a:endParaRPr>
@@ -10698,37 +10691,7 @@
                 <a:latin typeface="Neue Haas Grotesk Text Pro"/>
                 <a:cs typeface="Arial"/>
               </a:rPr>
-              <a:t>6497 rekordów : 75%  win białych</a:t>
-            </a:r>
-            <a:r>
-              <a:rPr lang="pl-PL" dirty="0">
-                <a:solidFill>
-                  <a:srgbClr val="FFFFFF"/>
-                </a:solidFill>
-                <a:ea typeface="+mn-lt"/>
-                <a:cs typeface="+mn-lt"/>
-              </a:rPr>
-              <a:t>🥂</a:t>
-            </a:r>
-            <a:r>
-              <a:rPr lang="pl-PL" dirty="0">
-                <a:solidFill>
-                  <a:srgbClr val="FFFFFF"/>
-                </a:solidFill>
-                <a:latin typeface="Neue Haas Grotesk Text Pro"/>
-                <a:cs typeface="Arial"/>
-              </a:rPr>
-              <a:t>, 25%  win czerwonych</a:t>
-            </a:r>
-            <a:r>
-              <a:rPr lang="pl-PL" dirty="0">
-                <a:solidFill>
-                  <a:srgbClr val="FFFFFF"/>
-                </a:solidFill>
-                <a:ea typeface="+mn-lt"/>
-                <a:cs typeface="+mn-lt"/>
-              </a:rPr>
-              <a:t>🍷</a:t>
+              <a:t>6497 rekordów</a:t>
             </a:r>
             <a:endParaRPr lang="pl-PL" dirty="0"/>
           </a:p>
@@ -10943,6 +10906,13 @@
               </a:rPr>
               <a:t>pH</a:t>
             </a:r>
+            <a:endParaRPr lang="pl-PL">
+              <a:solidFill>
+                <a:srgbClr val="FFFFFF"/>
+              </a:solidFill>
+              <a:latin typeface="Neue Haas Grotesk Text Pro"/>
+              <a:cs typeface="Arial"/>
+            </a:endParaRPr>
           </a:p>
           <a:p>
             <a:pPr lvl="1">
@@ -11034,6 +11004,13 @@
               </a:rPr>
               <a:t>Scaler</a:t>
             </a:r>
+            <a:endParaRPr lang="pl-PL">
+              <a:solidFill>
+                <a:srgbClr val="FFFFFF"/>
+              </a:solidFill>
+              <a:latin typeface="Neue Haas Grotesk Text Pro"/>
+              <a:cs typeface="Arial"/>
+            </a:endParaRPr>
           </a:p>
           <a:p>
             <a:pPr marL="228600" lvl="1" indent="0">
